--- a/public/fun/pack/pptx/weddingpro/결혼식프리미엄_04_오시는길중심_화이트골드.pptx
+++ b/public/fun/pack/pptx/weddingpro/결혼식프리미엄_04_오시는길중심_화이트골드.pptx
@@ -113,12 +113,12 @@
   <p:extLst>
     <p:ext uri="{521415D9-36F7-43E2-AB2F-B90AF26B5E84}">
       <p14:sectionLst xmlns:p14="http://schemas.microsoft.com/office/powerpoint/2010/main">
-        <p14:section name="시작" id="{01CF3FF8-078B-4E1A-844F-2BCCA1066AD3}">
+        <p14:section name="시작" id="{6A835E3A-21E8-4204-98DC-DF6D4C3E7BC7}">
           <p14:sldIdLst>
             <p14:sldId id="256"/>
           </p14:sldIdLst>
         </p14:section>
-        <p14:section name="본문" id="{A535BAFD-DCE6-41BA-A94E-E95ED1DB2AFA}">
+        <p14:section name="본문" id="{B8E64832-7692-4B9B-BCFC-9E9B516B5E30}">
           <p14:sldIdLst>
             <p14:sldId id="257"/>
             <p14:sldId id="258"/>
@@ -127,7 +127,7 @@
             <p14:sldId id="261"/>
           </p14:sldIdLst>
         </p14:section>
-        <p14:section name="마무리" id="{F2B82706-C0CF-479F-8839-104EB15AC1D6}">
+        <p14:section name="마무리" id="{5E3B6BC5-E637-4A94-9F6F-9A39EF086D20}">
           <p14:sldIdLst>
             <p14:sldId id="262"/>
           </p14:sldIdLst>
@@ -1516,7 +1516,7 @@
             </a:lvl1pPr>
           </a:lstStyle>
           <a:p>
-            <a:fld id="{CE134660-48C4-4B79-AF1A-A70BDA519156}" type="slidenum">
+            <a:fld id="{F1E9B0B6-344F-4EAC-9C57-BAA4BC39CD95}" type="slidenum">
               <a:rPr lang="en-US"/>
               <a:t>‹#›</a:t>
             </a:fld>
@@ -2234,7 +2234,7 @@
             </a:lvl1pPr>
           </a:lstStyle>
           <a:p>
-            <a:fld id="{C22446D7-CB07-4881-93ED-33200C3AFFC8}" type="slidenum">
+            <a:fld id="{64CFDA03-8CBA-4D9C-9B88-0E4B5550ED52}" type="slidenum">
               <a:rPr lang="en-US"/>
               <a:t>‹#›</a:t>
             </a:fld>
@@ -2987,7 +2987,7 @@
             </a:lvl1pPr>
           </a:lstStyle>
           <a:p>
-            <a:fld id="{BC031AA6-4FDE-41F6-B806-DEE29A742F04}" type="slidenum">
+            <a:fld id="{C9619737-E618-4A64-A7F9-4B2F01AFF8BE}" type="slidenum">
               <a:rPr lang="en-US"/>
               <a:t>‹#›</a:t>
             </a:fld>
@@ -3970,7 +3970,7 @@
           <a:p>
             <a:r>
               <a:rPr lang="ko-KR"/>
-              <a:t>0000. 00. 00 · 예식장 이름</a:t>
+              <a:t>날짜 입력 · 예식장 이름</a:t>
             </a:r>
           </a:p>
         </p:txBody>
@@ -4193,7 +4193,7 @@
           <a:bodyPr/>
           <a:lstStyle/>
           <a:p>
-            <a:fld id="{A6AF473B-0A12-4CF3-B461-F3FC0C42E6C0}" type="slidenum">
+            <a:fld id="{D604AB25-CFE5-4B88-932C-113469CEE0F0}" type="slidenum">
               <a:rPr lang="en-US"/>
               <a:t>‹#›</a:t>
             </a:fld>
@@ -4665,7 +4665,7 @@
           <a:bodyPr/>
           <a:lstStyle/>
           <a:p>
-            <a:fld id="{0409F5B9-39D6-49AA-BF01-45A695FB77FE}" type="slidenum">
+            <a:fld id="{10DC4106-083C-4663-B8A2-CFA7BC2E5776}" type="slidenum">
               <a:rPr lang="en-US"/>
               <a:t>‹#›</a:t>
             </a:fld>
@@ -5103,7 +5103,7 @@
           <a:bodyPr/>
           <a:lstStyle/>
           <a:p>
-            <a:fld id="{3402996A-8815-4226-996C-24D8BD6FBA69}" type="slidenum">
+            <a:fld id="{15931B69-884C-4369-8813-0BE47B0BF5E9}" type="slidenum">
               <a:rPr lang="en-US"/>
               <a:t>‹#›</a:t>
             </a:fld>
@@ -6376,7 +6376,7 @@
           <a:bodyPr/>
           <a:lstStyle/>
           <a:p>
-            <a:fld id="{F80EBECB-7A93-430F-BA65-43E4D7C8639B}" type="slidenum">
+            <a:fld id="{23BC4235-FD7A-477D-8CC5-CCD5CAF28E97}" type="slidenum">
               <a:rPr lang="en-US"/>
               <a:t>‹#›</a:t>
             </a:fld>
@@ -6464,7 +6464,7 @@
           <a:bodyPr/>
           <a:lstStyle/>
           <a:p>
-            <a:fld id="{CE0BC3BE-0133-4107-93EB-B2F938050868}" type="slidenum">
+            <a:fld id="{1BD224A8-72F9-4BDB-BA81-36F8CFE3490B}" type="slidenum">
               <a:rPr lang="en-US"/>
               <a:t>‹#›</a:t>
             </a:fld>
